--- a/資料/企画書.pptx
+++ b/資料/企画書.pptx
@@ -10,7 +10,10 @@
     <p:sldId id="259" r:id="rId4"/>
     <p:sldId id="258" r:id="rId5"/>
     <p:sldId id="261" r:id="rId6"/>
-    <p:sldId id="260" r:id="rId7"/>
+    <p:sldId id="264" r:id="rId7"/>
+    <p:sldId id="260" r:id="rId8"/>
+    <p:sldId id="263" r:id="rId9"/>
+    <p:sldId id="262" r:id="rId10"/>
   </p:sldIdLst>
   <p:sldSz cx="12192000" cy="6858000"/>
   <p:notesSz cx="6858000" cy="9144000"/>
@@ -254,7 +257,7 @@
           <a:p>
             <a:fld id="{0E02A643-9BB0-4E02-80B2-2C0A5E5D738E}" type="datetimeFigureOut">
               <a:rPr kumimoji="1" lang="ja-JP" altLang="en-US" smtClean="0"/>
-              <a:t>2026/5/12</a:t>
+              <a:t>2026/5/13</a:t>
             </a:fld>
             <a:endParaRPr kumimoji="1" lang="ja-JP" altLang="en-US"/>
           </a:p>
@@ -454,7 +457,7 @@
           <a:p>
             <a:fld id="{0E02A643-9BB0-4E02-80B2-2C0A5E5D738E}" type="datetimeFigureOut">
               <a:rPr kumimoji="1" lang="ja-JP" altLang="en-US" smtClean="0"/>
-              <a:t>2026/5/12</a:t>
+              <a:t>2026/5/13</a:t>
             </a:fld>
             <a:endParaRPr kumimoji="1" lang="ja-JP" altLang="en-US"/>
           </a:p>
@@ -664,7 +667,7 @@
           <a:p>
             <a:fld id="{0E02A643-9BB0-4E02-80B2-2C0A5E5D738E}" type="datetimeFigureOut">
               <a:rPr kumimoji="1" lang="ja-JP" altLang="en-US" smtClean="0"/>
-              <a:t>2026/5/12</a:t>
+              <a:t>2026/5/13</a:t>
             </a:fld>
             <a:endParaRPr kumimoji="1" lang="ja-JP" altLang="en-US"/>
           </a:p>
@@ -864,7 +867,7 @@
           <a:p>
             <a:fld id="{0E02A643-9BB0-4E02-80B2-2C0A5E5D738E}" type="datetimeFigureOut">
               <a:rPr kumimoji="1" lang="ja-JP" altLang="en-US" smtClean="0"/>
-              <a:t>2026/5/12</a:t>
+              <a:t>2026/5/13</a:t>
             </a:fld>
             <a:endParaRPr kumimoji="1" lang="ja-JP" altLang="en-US"/>
           </a:p>
@@ -1109,7 +1112,7 @@
           <a:p>
             <a:fld id="{0E02A643-9BB0-4E02-80B2-2C0A5E5D738E}" type="datetimeFigureOut">
               <a:rPr kumimoji="1" lang="ja-JP" altLang="en-US" smtClean="0"/>
-              <a:t>2026/5/12</a:t>
+              <a:t>2026/5/13</a:t>
             </a:fld>
             <a:endParaRPr kumimoji="1" lang="ja-JP" altLang="en-US"/>
           </a:p>
@@ -1402,7 +1405,7 @@
           <a:p>
             <a:fld id="{0E02A643-9BB0-4E02-80B2-2C0A5E5D738E}" type="datetimeFigureOut">
               <a:rPr kumimoji="1" lang="ja-JP" altLang="en-US" smtClean="0"/>
-              <a:t>2026/5/12</a:t>
+              <a:t>2026/5/13</a:t>
             </a:fld>
             <a:endParaRPr kumimoji="1" lang="ja-JP" altLang="en-US"/>
           </a:p>
@@ -1830,7 +1833,7 @@
           <a:p>
             <a:fld id="{0E02A643-9BB0-4E02-80B2-2C0A5E5D738E}" type="datetimeFigureOut">
               <a:rPr kumimoji="1" lang="ja-JP" altLang="en-US" smtClean="0"/>
-              <a:t>2026/5/12</a:t>
+              <a:t>2026/5/13</a:t>
             </a:fld>
             <a:endParaRPr kumimoji="1" lang="ja-JP" altLang="en-US"/>
           </a:p>
@@ -1947,7 +1950,7 @@
           <a:p>
             <a:fld id="{0E02A643-9BB0-4E02-80B2-2C0A5E5D738E}" type="datetimeFigureOut">
               <a:rPr kumimoji="1" lang="ja-JP" altLang="en-US" smtClean="0"/>
-              <a:t>2026/5/12</a:t>
+              <a:t>2026/5/13</a:t>
             </a:fld>
             <a:endParaRPr kumimoji="1" lang="ja-JP" altLang="en-US"/>
           </a:p>
@@ -2042,7 +2045,7 @@
           <a:p>
             <a:fld id="{0E02A643-9BB0-4E02-80B2-2C0A5E5D738E}" type="datetimeFigureOut">
               <a:rPr kumimoji="1" lang="ja-JP" altLang="en-US" smtClean="0"/>
-              <a:t>2026/5/12</a:t>
+              <a:t>2026/5/13</a:t>
             </a:fld>
             <a:endParaRPr kumimoji="1" lang="ja-JP" altLang="en-US"/>
           </a:p>
@@ -2349,7 +2352,7 @@
           <a:p>
             <a:fld id="{0E02A643-9BB0-4E02-80B2-2C0A5E5D738E}" type="datetimeFigureOut">
               <a:rPr kumimoji="1" lang="ja-JP" altLang="en-US" smtClean="0"/>
-              <a:t>2026/5/12</a:t>
+              <a:t>2026/5/13</a:t>
             </a:fld>
             <a:endParaRPr kumimoji="1" lang="ja-JP" altLang="en-US"/>
           </a:p>
@@ -2601,7 +2604,7 @@
           <a:p>
             <a:fld id="{0E02A643-9BB0-4E02-80B2-2C0A5E5D738E}" type="datetimeFigureOut">
               <a:rPr kumimoji="1" lang="ja-JP" altLang="en-US" smtClean="0"/>
-              <a:t>2026/5/12</a:t>
+              <a:t>2026/5/13</a:t>
             </a:fld>
             <a:endParaRPr kumimoji="1" lang="ja-JP" altLang="en-US"/>
           </a:p>
@@ -2844,7 +2847,7 @@
           <a:p>
             <a:fld id="{0E02A643-9BB0-4E02-80B2-2C0A5E5D738E}" type="datetimeFigureOut">
               <a:rPr kumimoji="1" lang="ja-JP" altLang="en-US" smtClean="0"/>
-              <a:t>2026/5/12</a:t>
+              <a:t>2026/5/13</a:t>
             </a:fld>
             <a:endParaRPr kumimoji="1" lang="ja-JP" altLang="en-US"/>
           </a:p>
@@ -3380,16 +3383,25 @@
               <a:buNone/>
             </a:pPr>
             <a:r>
-              <a:rPr lang="ja-JP" altLang="en-US">
+              <a:rPr lang="ja-JP" altLang="en-US" dirty="0">
                 <a:latin typeface="Aptos"/>
                 <a:ea typeface="ＭＳ Ｐゴシック"/>
               </a:rPr>
+              <a:t>タイトル：ギュン</a:t>
+            </a:r>
+            <a:br>
+              <a:rPr lang="en-US" altLang="ja-JP" dirty="0">
+                <a:latin typeface="Aptos"/>
+                <a:ea typeface="ＭＳ Ｐゴシック"/>
+              </a:rPr>
+            </a:br>
+            <a:r>
+              <a:rPr lang="ja-JP" altLang="en-US" dirty="0">
+                <a:latin typeface="Aptos"/>
+                <a:ea typeface="ＭＳ Ｐゴシック"/>
+              </a:rPr>
               <a:t>コンセプト：スピード感を感じる</a:t>
             </a:r>
-            <a:endParaRPr lang="ja-JP" altLang="en-US" dirty="0">
-              <a:latin typeface="Aptos"/>
-              <a:ea typeface="ＭＳ Ｐゴシック"/>
-            </a:endParaRPr>
           </a:p>
           <a:p>
             <a:pPr marL="0" indent="0">
@@ -3405,23 +3417,19 @@
               <a:buNone/>
             </a:pPr>
             <a:r>
-              <a:rPr lang="ja-JP" altLang="en-US">
+              <a:rPr lang="ja-JP" altLang="en-US" dirty="0">
                 <a:latin typeface="Aptos"/>
                 <a:ea typeface="ＭＳ Ｐゴシック"/>
               </a:rPr>
-              <a:t>テーマ：動画編集を能力</a:t>
-            </a:r>
-            <a:endParaRPr lang="ja-JP" altLang="en-US" dirty="0">
-              <a:latin typeface="Aptos"/>
-              <a:ea typeface="ＭＳ Ｐゴシック"/>
-            </a:endParaRPr>
+              <a:t>テーマ：スケボー</a:t>
+            </a:r>
           </a:p>
           <a:p>
             <a:pPr marL="0" indent="0">
               <a:buNone/>
             </a:pPr>
             <a:r>
-              <a:rPr lang="ja-JP" altLang="en-US">
+              <a:rPr lang="ja-JP" altLang="en-US" dirty="0">
                 <a:latin typeface="Aptos"/>
                 <a:ea typeface="ＭＳ Ｐゴシック"/>
               </a:rPr>
@@ -3434,16 +3442,12 @@
               </a:rPr>
             </a:br>
             <a:r>
-              <a:rPr lang="ja-JP" altLang="en-US">
+              <a:rPr lang="ja-JP" altLang="en-US" dirty="0">
                 <a:latin typeface="Aptos"/>
                 <a:ea typeface="ＭＳ Ｐゴシック"/>
               </a:rPr>
               <a:t>zzz</a:t>
             </a:r>
-            <a:endParaRPr lang="ja-JP" altLang="en-US" dirty="0">
-              <a:latin typeface="Aptos"/>
-              <a:ea typeface="ＭＳ Ｐゴシック"/>
-            </a:endParaRPr>
           </a:p>
         </p:txBody>
       </p:sp>
@@ -3537,10 +3541,21 @@
               <a:buNone/>
             </a:pPr>
             <a:r>
-              <a:rPr lang="ja-JP" altLang="en-US">
+              <a:rPr lang="ja-JP" altLang="en-US" dirty="0">
                 <a:ea typeface="ＭＳ Ｐゴシック"/>
               </a:rPr>
               <a:t>近接距離での戦闘のスピード感を感じさせる</a:t>
+            </a:r>
+            <a:br>
+              <a:rPr lang="en-US" altLang="ja-JP" dirty="0">
+                <a:ea typeface="ＭＳ Ｐゴシック"/>
+              </a:rPr>
+            </a:br>
+            <a:r>
+              <a:rPr lang="ja-JP" altLang="en-US" dirty="0">
+                <a:ea typeface="ＭＳ Ｐゴシック"/>
+              </a:rPr>
+              <a:t>居合切りのような感覚を出す</a:t>
             </a:r>
             <a:br>
               <a:rPr lang="ja-JP" altLang="en-US" dirty="0">
@@ -3641,17 +3656,122 @@
               <a:buNone/>
             </a:pPr>
             <a:r>
-              <a:rPr lang="ja-JP" altLang="en-US">
-                <a:ea typeface="ＭＳ Ｐゴシック"/>
-              </a:rPr>
-              <a:t>敵を倒すと勝利</a:t>
-            </a:r>
+              <a:rPr lang="ja-JP" altLang="en-US" dirty="0">
+                <a:ea typeface="ＭＳ Ｐゴシック"/>
+              </a:rPr>
+              <a:t>制限時間</a:t>
+            </a:r>
+            <a:r>
+              <a:rPr lang="en-US" altLang="ja-JP" dirty="0">
+                <a:ea typeface="ＭＳ Ｐゴシック"/>
+              </a:rPr>
+              <a:t>:2~3</a:t>
+            </a:r>
+            <a:r>
+              <a:rPr lang="ja-JP" altLang="en-US" dirty="0">
+                <a:ea typeface="ＭＳ Ｐゴシック"/>
+              </a:rPr>
+              <a:t>分</a:t>
+            </a:r>
+            <a:br>
+              <a:rPr lang="en-US" altLang="ja-JP" dirty="0">
+                <a:ea typeface="ＭＳ Ｐゴシック"/>
+              </a:rPr>
+            </a:br>
+            <a:r>
+              <a:rPr lang="ja-JP" altLang="en-US" dirty="0">
+                <a:ea typeface="ＭＳ Ｐゴシック"/>
+              </a:rPr>
+              <a:t>敵のトーテムを壊すとクリア</a:t>
+            </a:r>
+            <a:br>
+              <a:rPr lang="en-US" altLang="ja-JP" dirty="0">
+                <a:ea typeface="ＭＳ Ｐゴシック"/>
+              </a:rPr>
+            </a:br>
+            <a:br>
+              <a:rPr lang="en-US" altLang="ja-JP" dirty="0">
+                <a:ea typeface="ＭＳ Ｐゴシック"/>
+              </a:rPr>
+            </a:br>
+            <a:r>
+              <a:rPr lang="ja-JP" altLang="en-US" dirty="0">
+                <a:ea typeface="ＭＳ Ｐゴシック"/>
+              </a:rPr>
+              <a:t>トーテムを壊す条件</a:t>
+            </a:r>
+            <a:br>
+              <a:rPr lang="en-US" altLang="ja-JP" dirty="0">
+                <a:ea typeface="ＭＳ Ｐゴシック"/>
+              </a:rPr>
+            </a:br>
+            <a:r>
+              <a:rPr lang="ja-JP" altLang="en-US" dirty="0">
+                <a:ea typeface="ＭＳ Ｐゴシック"/>
+              </a:rPr>
+              <a:t>　通常は攻撃をしてもダメージを与えれないが、</a:t>
+            </a:r>
+            <a:br>
+              <a:rPr lang="en-US" altLang="ja-JP" dirty="0">
+                <a:ea typeface="ＭＳ Ｐゴシック"/>
+              </a:rPr>
+            </a:br>
+            <a:r>
+              <a:rPr lang="ja-JP" altLang="en-US" dirty="0">
+                <a:ea typeface="ＭＳ Ｐゴシック"/>
+              </a:rPr>
+              <a:t>　ステージにいる敵をノックダウンするとダメージを与えれる。</a:t>
+            </a:r>
+            <a:br>
+              <a:rPr lang="en-US" altLang="ja-JP" dirty="0">
+                <a:ea typeface="ＭＳ Ｐゴシック"/>
+              </a:rPr>
+            </a:br>
+            <a:br>
+              <a:rPr lang="en-US" altLang="ja-JP" dirty="0">
+                <a:ea typeface="ＭＳ Ｐゴシック"/>
+              </a:rPr>
+            </a:br>
+            <a:r>
+              <a:rPr lang="ja-JP" altLang="en-US" dirty="0">
+                <a:ea typeface="ＭＳ Ｐゴシック"/>
+              </a:rPr>
+              <a:t>敵に攻撃を与えると一定時間動けないようにする。</a:t>
+            </a:r>
+            <a:br>
+              <a:rPr lang="en-US" altLang="ja-JP" dirty="0">
+                <a:ea typeface="ＭＳ Ｐゴシック"/>
+              </a:rPr>
+            </a:br>
+            <a:r>
+              <a:rPr lang="ja-JP" altLang="en-US" dirty="0">
+                <a:ea typeface="ＭＳ Ｐゴシック"/>
+              </a:rPr>
+              <a:t>プレイヤーがダメージを受けると一定時間（無敵</a:t>
+            </a:r>
+            <a:r>
+              <a:rPr lang="en-US" altLang="ja-JP" dirty="0">
+                <a:ea typeface="ＭＳ Ｐゴシック"/>
+              </a:rPr>
+              <a:t>+</a:t>
+            </a:r>
+            <a:r>
+              <a:rPr lang="ja-JP" altLang="en-US" dirty="0">
+                <a:ea typeface="ＭＳ Ｐゴシック"/>
+              </a:rPr>
+              <a:t>移動速度アップ）</a:t>
+            </a:r>
+            <a:br>
+              <a:rPr lang="en-US" altLang="ja-JP" dirty="0">
+                <a:ea typeface="ＭＳ Ｐゴシック"/>
+              </a:rPr>
+            </a:br>
             <a:br>
               <a:rPr lang="ja-JP" altLang="en-US" dirty="0">
                 <a:ea typeface="ＭＳ Ｐゴシック"/>
               </a:rPr>
             </a:br>
-            <a:endParaRPr lang="ja-JP" altLang="en-US"/>
+            <a:endParaRPr lang="ja-JP" altLang="en-US" dirty="0"/>
           </a:p>
         </p:txBody>
       </p:sp>
@@ -3743,7 +3863,7 @@
               <a:buNone/>
             </a:pPr>
             <a:r>
-              <a:rPr lang="ja-JP">
+              <a:rPr lang="ja-JP" dirty="0">
                 <a:ea typeface="ＭＳ Ｐゴシック"/>
               </a:rPr>
               <a:t>前加速</a:t>
@@ -3754,7 +3874,7 @@
               </a:rPr>
             </a:br>
             <a:r>
-              <a:rPr lang="ja-JP">
+              <a:rPr lang="ja-JP" dirty="0">
                 <a:ea typeface="ＭＳ Ｐゴシック"/>
               </a:rPr>
               <a:t>左右：方向転換</a:t>
@@ -3765,10 +3885,36 @@
               </a:rPr>
             </a:br>
             <a:r>
-              <a:rPr lang="ja-JP" altLang="en-US">
+              <a:rPr lang="ja-JP" altLang="en-US" dirty="0">
                 <a:ea typeface="ＭＳ Ｐゴシック"/>
               </a:rPr>
               <a:t>後ろブレーキ</a:t>
+            </a:r>
+            <a:endParaRPr lang="en-US" altLang="ja-JP" dirty="0">
+              <a:ea typeface="ＭＳ Ｐゴシック"/>
+            </a:endParaRPr>
+          </a:p>
+          <a:p>
+            <a:pPr marL="0" indent="0">
+              <a:buNone/>
+            </a:pPr>
+            <a:r>
+              <a:rPr lang="ja-JP" altLang="en-US" dirty="0">
+                <a:ea typeface="ＭＳ Ｐゴシック"/>
+              </a:rPr>
+              <a:t>アクション：攻撃</a:t>
+            </a:r>
+            <a:r>
+              <a:rPr lang="en-US" altLang="ja-JP" dirty="0">
+                <a:ea typeface="ＭＳ Ｐゴシック"/>
+              </a:rPr>
+              <a:t>+</a:t>
+            </a:r>
+            <a:r>
+              <a:rPr lang="ja-JP" altLang="en-US" dirty="0">
+                <a:ea typeface="ＭＳ Ｐゴシック"/>
+              </a:rPr>
+              <a:t>サイドブレーキ</a:t>
             </a:r>
             <a:br>
               <a:rPr lang="ja-JP" altLang="en-US" dirty="0">
@@ -3776,29 +3922,35 @@
               </a:rPr>
             </a:br>
             <a:r>
-              <a:rPr lang="ja-JP" altLang="en-US">
+              <a:rPr lang="ja-JP" altLang="en-US" dirty="0">
                 <a:ea typeface="ＭＳ Ｐゴシック"/>
               </a:rPr>
               <a:t>​</a:t>
+            </a:r>
+            <a:endParaRPr lang="ja-JP" dirty="0">
+              <a:ea typeface="ＭＳ Ｐゴシック"/>
+            </a:endParaRPr>
+          </a:p>
+          <a:p>
+            <a:pPr marL="0" indent="0">
+              <a:buNone/>
+            </a:pPr>
+            <a:r>
+              <a:rPr lang="ja-JP" altLang="en-US" dirty="0">
+                <a:ea typeface="ＭＳ Ｐゴシック"/>
+              </a:rPr>
+              <a:t>常に前方に移動している</a:t>
             </a:r>
             <a:br>
               <a:rPr lang="ja-JP" altLang="en-US" dirty="0">
                 <a:ea typeface="ＭＳ Ｐゴシック"/>
               </a:rPr>
             </a:br>
-            <a:endParaRPr lang="ja-JP">
-              <a:ea typeface="ＭＳ Ｐゴシック"/>
-            </a:endParaRPr>
-          </a:p>
-          <a:p>
-            <a:pPr marL="0" indent="0">
-              <a:buNone/>
-            </a:pPr>
-            <a:r>
-              <a:rPr lang="ja-JP" altLang="en-US">
-                <a:ea typeface="ＭＳ Ｐゴシック"/>
-              </a:rPr>
-              <a:t>常に前方に移動している</a:t>
+            <a:r>
+              <a:rPr lang="ja-JP" altLang="en-US" dirty="0">
+                <a:ea typeface="ＭＳ Ｐゴシック"/>
+              </a:rPr>
+              <a:t>移動している方向と移動したい方向のベクトルを持ち、</a:t>
             </a:r>
             <a:br>
               <a:rPr lang="ja-JP" altLang="en-US" dirty="0">
@@ -3806,36 +3958,33 @@
               </a:rPr>
             </a:br>
             <a:r>
-              <a:rPr lang="ja-JP" altLang="en-US">
-                <a:ea typeface="ＭＳ Ｐゴシック"/>
-              </a:rPr>
-              <a:t>攻撃をすると速度が上がる</a:t>
+              <a:rPr lang="ja-JP" altLang="en-US" dirty="0">
+                <a:ea typeface="ＭＳ Ｐゴシック"/>
+              </a:rPr>
+              <a:t>移動速度が大きいほど横に移動しずらくなる。</a:t>
             </a:r>
             <a:br>
+              <a:rPr lang="en-US" altLang="ja-JP" dirty="0">
+                <a:ea typeface="ＭＳ Ｐゴシック"/>
+              </a:rPr>
+            </a:br>
+            <a:r>
               <a:rPr lang="ja-JP" altLang="en-US" dirty="0">
                 <a:ea typeface="ＭＳ Ｐゴシック"/>
               </a:rPr>
+              <a:t>十分な速度でサイドブレーキを押すと敵にダメージを与えれる</a:t>
+            </a:r>
+            <a:br>
+              <a:rPr lang="en-US" altLang="ja-JP" dirty="0">
+                <a:ea typeface="ＭＳ Ｐゴシック"/>
+              </a:rPr>
             </a:br>
             <a:r>
-              <a:rPr lang="ja-JP" altLang="en-US">
-                <a:ea typeface="ＭＳ Ｐゴシック"/>
-              </a:rPr>
-              <a:t>移動している方向と移動したい方向のベクトルを持ち、</a:t>
-            </a:r>
-            <a:br>
               <a:rPr lang="ja-JP" altLang="en-US" dirty="0">
                 <a:ea typeface="ＭＳ Ｐゴシック"/>
               </a:rPr>
-            </a:br>
-            <a:r>
-              <a:rPr lang="ja-JP" altLang="en-US">
-                <a:ea typeface="ＭＳ Ｐゴシック"/>
-              </a:rPr>
-              <a:t>移動速度が大きいほど横に</a:t>
-            </a:r>
-            <a:endParaRPr lang="ja-JP" altLang="en-US" dirty="0">
-              <a:ea typeface="ＭＳ Ｐゴシック"/>
-            </a:endParaRPr>
+              <a:t>（十分な速度以下だとダメージを与えれない）</a:t>
+            </a:r>
           </a:p>
         </p:txBody>
       </p:sp>
@@ -3874,6 +4023,132 @@
           <p:cNvPr id="2" name="タイトル 1">
             <a:extLst>
               <a:ext uri="{FF2B5EF4-FFF2-40B4-BE49-F238E27FC236}">
+                <a16:creationId xmlns:a16="http://schemas.microsoft.com/office/drawing/2014/main" id="{24A21FCF-F2AC-0498-1E2A-6E478401E60B}"/>
+              </a:ext>
+            </a:extLst>
+          </p:cNvPr>
+          <p:cNvSpPr>
+            <a:spLocks noGrp="1"/>
+          </p:cNvSpPr>
+          <p:nvPr>
+            <p:ph type="title"/>
+          </p:nvPr>
+        </p:nvSpPr>
+        <p:spPr/>
+        <p:txBody>
+          <a:bodyPr/>
+          <a:lstStyle/>
+          <a:p>
+            <a:r>
+              <a:rPr kumimoji="1" lang="ja-JP" altLang="en-US" dirty="0"/>
+              <a:t>プレイヤー</a:t>
+            </a:r>
+          </a:p>
+        </p:txBody>
+      </p:sp>
+      <p:sp>
+        <p:nvSpPr>
+          <p:cNvPr id="3" name="コンテンツ プレースホルダー 2">
+            <a:extLst>
+              <a:ext uri="{FF2B5EF4-FFF2-40B4-BE49-F238E27FC236}">
+                <a16:creationId xmlns:a16="http://schemas.microsoft.com/office/drawing/2014/main" id="{A0283417-A688-D66B-5523-92A2E83C37F9}"/>
+              </a:ext>
+            </a:extLst>
+          </p:cNvPr>
+          <p:cNvSpPr>
+            <a:spLocks noGrp="1"/>
+          </p:cNvSpPr>
+          <p:nvPr>
+            <p:ph idx="1"/>
+          </p:nvPr>
+        </p:nvSpPr>
+        <p:spPr/>
+        <p:txBody>
+          <a:bodyPr/>
+          <a:lstStyle/>
+          <a:p>
+            <a:pPr marL="0" indent="0">
+              <a:buNone/>
+            </a:pPr>
+            <a:r>
+              <a:rPr kumimoji="1" lang="ja-JP" altLang="en-US" dirty="0"/>
+              <a:t>サイドブレーキを引くと移動速度を無視して曲がれる</a:t>
+            </a:r>
+            <a:br>
+              <a:rPr kumimoji="1" lang="en-US" altLang="ja-JP" dirty="0"/>
+            </a:br>
+            <a:r>
+              <a:rPr kumimoji="1" lang="ja-JP" altLang="en-US" dirty="0"/>
+              <a:t>サイドブレーキを話すと移動速度が上がりプレイヤーが向いている方向に</a:t>
+            </a:r>
+            <a:r>
+              <a:rPr lang="ja-JP" altLang="en-US" dirty="0"/>
+              <a:t>移動する。</a:t>
+            </a:r>
+            <a:br>
+              <a:rPr lang="en-US" altLang="ja-JP" dirty="0"/>
+            </a:br>
+            <a:br>
+              <a:rPr lang="en-US" altLang="ja-JP" dirty="0"/>
+            </a:br>
+            <a:r>
+              <a:rPr lang="ja-JP" altLang="en-US" dirty="0"/>
+              <a:t>サイドブレーキを押す</a:t>
+            </a:r>
+            <a:r>
+              <a:rPr lang="en-US" altLang="ja-JP" dirty="0"/>
+              <a:t>or</a:t>
+            </a:r>
+            <a:r>
+              <a:rPr lang="ja-JP" altLang="en-US" dirty="0"/>
+              <a:t>離す瞬間に敵に当たると敵にダメージを与え</a:t>
+            </a:r>
+            <a:br>
+              <a:rPr lang="en-US" altLang="ja-JP" dirty="0"/>
+            </a:br>
+            <a:r>
+              <a:rPr lang="ja-JP" altLang="en-US" dirty="0"/>
+              <a:t>移動速度が上がる</a:t>
+            </a:r>
+            <a:endParaRPr kumimoji="1" lang="ja-JP" altLang="en-US" dirty="0"/>
+          </a:p>
+        </p:txBody>
+      </p:sp>
+    </p:spTree>
+    <p:extLst>
+      <p:ext uri="{BB962C8B-B14F-4D97-AF65-F5344CB8AC3E}">
+        <p14:creationId xmlns:p14="http://schemas.microsoft.com/office/powerpoint/2010/main" val="2069842325"/>
+      </p:ext>
+    </p:extLst>
+  </p:cSld>
+  <p:clrMapOvr>
+    <a:masterClrMapping/>
+  </p:clrMapOvr>
+</p:sld>
+</file>
+
+<file path=ppt/slides/slide7.xml><?xml version="1.0" encoding="utf-8"?>
+<p:sld xmlns:a="http://schemas.openxmlformats.org/drawingml/2006/main" xmlns:r="http://schemas.openxmlformats.org/officeDocument/2006/relationships" xmlns:p="http://schemas.openxmlformats.org/presentationml/2006/main">
+  <p:cSld>
+    <p:spTree>
+      <p:nvGrpSpPr>
+        <p:cNvPr id="1" name=""/>
+        <p:cNvGrpSpPr/>
+        <p:nvPr/>
+      </p:nvGrpSpPr>
+      <p:grpSpPr>
+        <a:xfrm>
+          <a:off x="0" y="0"/>
+          <a:ext cx="0" cy="0"/>
+          <a:chOff x="0" y="0"/>
+          <a:chExt cx="0" cy="0"/>
+        </a:xfrm>
+      </p:grpSpPr>
+      <p:sp>
+        <p:nvSpPr>
+          <p:cNvPr id="2" name="タイトル 1">
+            <a:extLst>
+              <a:ext uri="{FF2B5EF4-FFF2-40B4-BE49-F238E27FC236}">
                 <a16:creationId xmlns:a16="http://schemas.microsoft.com/office/drawing/2014/main" id="{BD5FDF3D-97AC-C5B9-79A3-50E2424A6898}"/>
               </a:ext>
             </a:extLst>
@@ -3927,12 +4202,12 @@
               <a:buNone/>
             </a:pPr>
             <a:r>
-              <a:rPr lang="ja-JP" altLang="en-US">
+              <a:rPr lang="ja-JP" altLang="en-US" dirty="0">
                 <a:ea typeface="ＭＳ Ｐゴシック"/>
               </a:rPr>
               <a:t>常に移動している</a:t>
             </a:r>
-            <a:endParaRPr lang="ja-JP" altLang="en-US">
+            <a:endParaRPr lang="ja-JP" altLang="en-US" dirty="0">
               <a:ea typeface="ＭＳ Ｐゴシック" panose="020B0600070205080204" pitchFamily="34" charset="-128"/>
             </a:endParaRPr>
           </a:p>
@@ -3941,10 +4216,21 @@
               <a:buNone/>
             </a:pPr>
             <a:r>
-              <a:rPr lang="ja-JP" altLang="en-US">
-                <a:ea typeface="ＭＳ Ｐゴシック"/>
-              </a:rPr>
-              <a:t>当たったらダメージを与える</a:t>
+              <a:rPr lang="ja-JP" altLang="en-US" dirty="0">
+                <a:ea typeface="ＭＳ Ｐゴシック"/>
+              </a:rPr>
+              <a:t>武器を持っている</a:t>
+            </a:r>
+            <a:br>
+              <a:rPr lang="en-US" altLang="ja-JP" dirty="0">
+                <a:ea typeface="ＭＳ Ｐゴシック"/>
+              </a:rPr>
+            </a:br>
+            <a:r>
+              <a:rPr lang="ja-JP" altLang="en-US" dirty="0">
+                <a:ea typeface="ＭＳ Ｐゴシック"/>
+              </a:rPr>
+              <a:t>武器に当たるとプレイヤーにダメージを与える</a:t>
             </a:r>
             <a:br>
               <a:rPr lang="ja-JP" altLang="en-US" dirty="0">
@@ -3952,7 +4238,7 @@
               </a:rPr>
             </a:br>
             <a:r>
-              <a:rPr lang="ja-JP" altLang="en-US">
+              <a:rPr lang="ja-JP" altLang="en-US" dirty="0">
                 <a:ea typeface="ＭＳ Ｐゴシック"/>
               </a:rPr>
               <a:t>常にプレイヤー方向のベクトルと自身の移動方向のベクトルを持ち​</a:t>
@@ -3963,7 +4249,7 @@
               </a:rPr>
             </a:br>
             <a:r>
-              <a:rPr lang="ja-JP" altLang="en-US">
+              <a:rPr lang="ja-JP" altLang="en-US" dirty="0">
                 <a:ea typeface="ＭＳ Ｐゴシック"/>
               </a:rPr>
               <a:t>滑らかにプレイヤーに向かうようにする​</a:t>
@@ -3974,7 +4260,7 @@
               </a:rPr>
             </a:br>
             <a:r>
-              <a:rPr lang="ja-JP" altLang="en-US">
+              <a:rPr lang="ja-JP" altLang="en-US" dirty="0">
                 <a:ea typeface="ＭＳ Ｐゴシック"/>
               </a:rPr>
               <a:t>移動ベクトルとプレイヤーベクトルの方向が</a:t>
@@ -3985,14 +4271,11 @@
               </a:rPr>
             </a:br>
             <a:r>
-              <a:rPr lang="ja-JP" altLang="en-US">
+              <a:rPr lang="ja-JP" altLang="en-US" dirty="0">
                 <a:ea typeface="ＭＳ Ｐゴシック"/>
               </a:rPr>
               <a:t>位置すればするほど速度が上がる​</a:t>
             </a:r>
-            <a:endParaRPr lang="ja-JP" altLang="en-US" dirty="0">
-              <a:ea typeface="ＭＳ Ｐゴシック"/>
-            </a:endParaRPr>
           </a:p>
         </p:txBody>
       </p:sp>
@@ -4185,6 +4468,218 @@
     <p:extLst>
       <p:ext uri="{BB962C8B-B14F-4D97-AF65-F5344CB8AC3E}">
         <p14:creationId xmlns:p14="http://schemas.microsoft.com/office/powerpoint/2010/main" val="2204195950"/>
+      </p:ext>
+    </p:extLst>
+  </p:cSld>
+  <p:clrMapOvr>
+    <a:masterClrMapping/>
+  </p:clrMapOvr>
+</p:sld>
+</file>
+
+<file path=ppt/slides/slide8.xml><?xml version="1.0" encoding="utf-8"?>
+<p:sld xmlns:a="http://schemas.openxmlformats.org/drawingml/2006/main" xmlns:r="http://schemas.openxmlformats.org/officeDocument/2006/relationships" xmlns:p="http://schemas.openxmlformats.org/presentationml/2006/main">
+  <p:cSld>
+    <p:spTree>
+      <p:nvGrpSpPr>
+        <p:cNvPr id="1" name=""/>
+        <p:cNvGrpSpPr/>
+        <p:nvPr/>
+      </p:nvGrpSpPr>
+      <p:grpSpPr>
+        <a:xfrm>
+          <a:off x="0" y="0"/>
+          <a:ext cx="0" cy="0"/>
+          <a:chOff x="0" y="0"/>
+          <a:chExt cx="0" cy="0"/>
+        </a:xfrm>
+      </p:grpSpPr>
+      <p:sp>
+        <p:nvSpPr>
+          <p:cNvPr id="2" name="タイトル 1">
+            <a:extLst>
+              <a:ext uri="{FF2B5EF4-FFF2-40B4-BE49-F238E27FC236}">
+                <a16:creationId xmlns:a16="http://schemas.microsoft.com/office/drawing/2014/main" id="{4CCA21D2-8AC4-2564-919A-71ED78808AC6}"/>
+              </a:ext>
+            </a:extLst>
+          </p:cNvPr>
+          <p:cNvSpPr>
+            <a:spLocks noGrp="1"/>
+          </p:cNvSpPr>
+          <p:nvPr>
+            <p:ph type="title"/>
+          </p:nvPr>
+        </p:nvSpPr>
+        <p:spPr/>
+        <p:txBody>
+          <a:bodyPr/>
+          <a:lstStyle/>
+          <a:p>
+            <a:r>
+              <a:rPr lang="ja-JP" altLang="en-US" dirty="0"/>
+              <a:t>敵</a:t>
+            </a:r>
+            <a:endParaRPr kumimoji="1" lang="ja-JP" altLang="en-US" dirty="0"/>
+          </a:p>
+        </p:txBody>
+      </p:sp>
+      <p:sp>
+        <p:nvSpPr>
+          <p:cNvPr id="3" name="コンテンツ プレースホルダー 2">
+            <a:extLst>
+              <a:ext uri="{FF2B5EF4-FFF2-40B4-BE49-F238E27FC236}">
+                <a16:creationId xmlns:a16="http://schemas.microsoft.com/office/drawing/2014/main" id="{49B1BEA8-7B0D-BA25-AE8C-000E070357EF}"/>
+              </a:ext>
+            </a:extLst>
+          </p:cNvPr>
+          <p:cNvSpPr>
+            <a:spLocks noGrp="1"/>
+          </p:cNvSpPr>
+          <p:nvPr>
+            <p:ph idx="1"/>
+          </p:nvPr>
+        </p:nvSpPr>
+        <p:spPr/>
+        <p:txBody>
+          <a:bodyPr/>
+          <a:lstStyle/>
+          <a:p>
+            <a:pPr marL="0" indent="0">
+              <a:buNone/>
+            </a:pPr>
+            <a:r>
+              <a:rPr kumimoji="1" lang="ja-JP" altLang="en-US" dirty="0"/>
+              <a:t>武器は剣のような近接系の武器</a:t>
+            </a:r>
+            <a:br>
+              <a:rPr kumimoji="1" lang="en-US" altLang="ja-JP" dirty="0"/>
+            </a:br>
+            <a:r>
+              <a:rPr kumimoji="1" lang="ja-JP" altLang="en-US" dirty="0"/>
+              <a:t>それを敵のアクションによって左右を持ち替えてくる</a:t>
+            </a:r>
+            <a:br>
+              <a:rPr kumimoji="1" lang="en-US" altLang="ja-JP" dirty="0"/>
+            </a:br>
+            <a:r>
+              <a:rPr kumimoji="1" lang="ja-JP" altLang="en-US" dirty="0"/>
+              <a:t>プレイヤーが武器に当たるとダメージを食らう</a:t>
+            </a:r>
+          </a:p>
+        </p:txBody>
+      </p:sp>
+    </p:spTree>
+    <p:extLst>
+      <p:ext uri="{BB962C8B-B14F-4D97-AF65-F5344CB8AC3E}">
+        <p14:creationId xmlns:p14="http://schemas.microsoft.com/office/powerpoint/2010/main" val="1346466368"/>
+      </p:ext>
+    </p:extLst>
+  </p:cSld>
+  <p:clrMapOvr>
+    <a:masterClrMapping/>
+  </p:clrMapOvr>
+</p:sld>
+</file>
+
+<file path=ppt/slides/slide9.xml><?xml version="1.0" encoding="utf-8"?>
+<p:sld xmlns:a="http://schemas.openxmlformats.org/drawingml/2006/main" xmlns:r="http://schemas.openxmlformats.org/officeDocument/2006/relationships" xmlns:p="http://schemas.openxmlformats.org/presentationml/2006/main">
+  <p:cSld>
+    <p:spTree>
+      <p:nvGrpSpPr>
+        <p:cNvPr id="1" name=""/>
+        <p:cNvGrpSpPr/>
+        <p:nvPr/>
+      </p:nvGrpSpPr>
+      <p:grpSpPr>
+        <a:xfrm>
+          <a:off x="0" y="0"/>
+          <a:ext cx="0" cy="0"/>
+          <a:chOff x="0" y="0"/>
+          <a:chExt cx="0" cy="0"/>
+        </a:xfrm>
+      </p:grpSpPr>
+      <p:sp>
+        <p:nvSpPr>
+          <p:cNvPr id="2" name="タイトル 1">
+            <a:extLst>
+              <a:ext uri="{FF2B5EF4-FFF2-40B4-BE49-F238E27FC236}">
+                <a16:creationId xmlns:a16="http://schemas.microsoft.com/office/drawing/2014/main" id="{B02B8321-D87F-FB1A-FDEF-34F2A7A861DA}"/>
+              </a:ext>
+            </a:extLst>
+          </p:cNvPr>
+          <p:cNvSpPr>
+            <a:spLocks noGrp="1"/>
+          </p:cNvSpPr>
+          <p:nvPr>
+            <p:ph type="title"/>
+          </p:nvPr>
+        </p:nvSpPr>
+        <p:spPr/>
+        <p:txBody>
+          <a:bodyPr/>
+          <a:lstStyle/>
+          <a:p>
+            <a:r>
+              <a:rPr lang="ja-JP" altLang="en-US" dirty="0"/>
+              <a:t>ステージ</a:t>
+            </a:r>
+            <a:endParaRPr kumimoji="1" lang="ja-JP" altLang="en-US" dirty="0"/>
+          </a:p>
+        </p:txBody>
+      </p:sp>
+      <p:sp>
+        <p:nvSpPr>
+          <p:cNvPr id="3" name="コンテンツ プレースホルダー 2">
+            <a:extLst>
+              <a:ext uri="{FF2B5EF4-FFF2-40B4-BE49-F238E27FC236}">
+                <a16:creationId xmlns:a16="http://schemas.microsoft.com/office/drawing/2014/main" id="{1942ACED-F53E-5342-10D1-6403875AF8C5}"/>
+              </a:ext>
+            </a:extLst>
+          </p:cNvPr>
+          <p:cNvSpPr>
+            <a:spLocks noGrp="1"/>
+          </p:cNvSpPr>
+          <p:nvPr>
+            <p:ph idx="1"/>
+          </p:nvPr>
+        </p:nvSpPr>
+        <p:spPr/>
+        <p:txBody>
+          <a:bodyPr/>
+          <a:lstStyle/>
+          <a:p>
+            <a:pPr marL="0" indent="0">
+              <a:buNone/>
+            </a:pPr>
+            <a:r>
+              <a:rPr kumimoji="1" lang="ja-JP" altLang="en-US" dirty="0"/>
+              <a:t>ステージ端は落ちないようにする。</a:t>
+            </a:r>
+            <a:br>
+              <a:rPr kumimoji="1" lang="en-US" altLang="ja-JP" dirty="0"/>
+            </a:br>
+            <a:r>
+              <a:rPr kumimoji="1" lang="ja-JP" altLang="en-US" dirty="0"/>
+              <a:t>壁に正面から激突するとスピードが落ちる。</a:t>
+            </a:r>
+            <a:br>
+              <a:rPr kumimoji="1" lang="en-US" altLang="ja-JP" dirty="0"/>
+            </a:br>
+            <a:r>
+              <a:rPr kumimoji="1" lang="ja-JP" altLang="en-US" dirty="0"/>
+              <a:t>壁に沿うように当たるとスピードが落ちない</a:t>
+            </a:r>
+            <a:br>
+              <a:rPr kumimoji="1" lang="en-US" altLang="ja-JP" dirty="0"/>
+            </a:br>
+            <a:endParaRPr kumimoji="1" lang="ja-JP" altLang="en-US" dirty="0"/>
+          </a:p>
+        </p:txBody>
+      </p:sp>
+    </p:spTree>
+    <p:extLst>
+      <p:ext uri="{BB962C8B-B14F-4D97-AF65-F5344CB8AC3E}">
+        <p14:creationId xmlns:p14="http://schemas.microsoft.com/office/powerpoint/2010/main" val="3618298790"/>
       </p:ext>
     </p:extLst>
   </p:cSld>
